--- a/assets/pptx/catalog-574.pptx
+++ b/assets/pptx/catalog-574.pptx
@@ -3248,7 +3248,7 @@
                 <a:ea typeface="Ebrima"/>
                 <a:cs typeface="Ebrima"/>
               </a:rPr>
-              <a:t>አንተኮ ውብ ነህ (4)</a:t>
+              <a:t>አንተኮ ውብ ነህ 4</a:t>
             </a:r>
           </a:p>
         </p:txBody>
@@ -3315,7 +3315,7 @@
                 <a:ea typeface="Ebrima"/>
                 <a:cs typeface="Ebrima"/>
               </a:rPr>
-              <a:t>እየሱስ ውብ ነህ (4)</a:t>
+              <a:t>እየሱስ ውብ ነህ 4</a:t>
             </a:r>
           </a:p>
         </p:txBody>
@@ -3583,7 +3583,7 @@
                 <a:ea typeface="Ebrima"/>
                 <a:cs typeface="Ebrima"/>
               </a:rPr>
-              <a:t>ህይወቴን ቀላል አርገህልኛል, የዳዊት ስርና ዘር, የሚያበራ የንጋት ኮከብ, የእግዚአብሔር ልጅ የሆነውን, እየሱስን አመልካለሁኝ, አመልካለሁኝ (3), አመልካለሁ, አመልካለሁኝ (2), የከበረ የተፈተነውን, መሰረቱ የፀናውን, የማእዘን እራስ የሆነውን,</a:t>
+              <a:t>ህይወቴን ቀላል አርገህልኛል, የዳዊት ስርና ዘር, የሚያበራ የንጋት ኮከብ, የእግዚአብሔር ልጅ የሆነውን, እየሱስን አመልካለሁኝ, አመልካለሁኝ 3, አመልካለሁ, አመልካለሁኝ 2, የከበረ የተፈተነውን, መሰረቱ የፀናውን, የማእዘን እራስ የሆነውን,</a:t>
             </a:r>
           </a:p>
           <a:p>
@@ -3601,7 +3601,7 @@
                 <a:ea typeface="Ebrima"/>
                 <a:cs typeface="Ebrima"/>
               </a:rPr>
-              <a:t>እየሱስን አመልካለሁኝ, አመልካለሁኝ (3), አመልካለሁ, አመልካለሁኝ (2)</a:t>
+              <a:t>እየሱስን አመልካለሁኝ, አመልካለሁኝ 3, አመልካለሁ, አመልካለሁኝ 2</a:t>
             </a:r>
           </a:p>
         </p:txBody>
@@ -3735,7 +3735,7 @@
                 <a:ea typeface="Ebrima"/>
                 <a:cs typeface="Ebrima"/>
               </a:rPr>
-              <a:t>የሰላምም አለቃ, የዘላለም አባት የሆነውን, እየሱስን አመልካለሁኝ, አመልካለሁኝ (3), አመልካለሁ, አመልካለሁኝ (2)</a:t>
+              <a:t>የሰላምም አለቃ, የዘላለም አባት የሆነውን, እየሱስን አመልካለሁኝ, አመልካለሁኝ 3, አመልካለሁ, አመልካለሁኝ 2</a:t>
             </a:r>
           </a:p>
         </p:txBody>
